--- a/deck/oasis-terraform-bridge.pptx
+++ b/deck/oasis-terraform-bridge.pptx
@@ -4394,7 +4394,7 @@
                 </a:solidFill>
                 <a:latin typeface="Calibri"/>
               </a:rPr>
-              <a:t>Policy rules fire on create + inline managed_policy_arns only. Miss updates, attachment resources, and trust-policy changes (who can assume the role).</a:t>
+              <a:t>Trust-policy changes now gated on create + update (wildcard deny, unconstrained cross-account warn). Still missing: attachment / inline evaluated as one effective-permission union.</a:t>
             </a:r>
           </a:p>
         </p:txBody>
@@ -5174,7 +5174,7 @@
                           </a:solidFill>
                           <a:latin typeface="Calibri"/>
                         </a:rPr>
-                        <a:t>env, criticality, privilege, credential type</a:t>
+                        <a:t>env, criticality, privilege, credential type · who can assume</a:t>
                       </a:r>
                     </a:p>
                   </a:txBody>
@@ -7242,6 +7242,25 @@
               <a:t>▪ The discovered payment-processor is matched by ARN and reconciled — not duplicated.</a:t>
             </a:r>
           </a:p>
+          <a:p>
+            <a:pPr>
+              <a:spcBef>
+                <a:spcPts val="0"/>
+              </a:spcBef>
+              <a:spcAft>
+                <a:spcPts val="1000"/>
+              </a:spcAft>
+            </a:pPr>
+            <a:r>
+              <a:rPr sz="1500">
+                <a:solidFill>
+                  <a:srgbClr val="1A1F2B"/>
+                </a:solidFill>
+                <a:latin typeface="Calibri"/>
+              </a:rPr>
+              <a:t>▪ Persists a trust surface: who can assume the role — principal, external?, ExternalId?</a:t>
+            </a:r>
+          </a:p>
         </p:txBody>
       </p:sp>
       <p:sp>
@@ -9454,6 +9473,25 @@
               <a:t>▪ Warnings (non-high) approve-with-warnings, surfaced on the PR.</a:t>
             </a:r>
           </a:p>
+          <a:p>
+            <a:pPr>
+              <a:spcBef>
+                <a:spcPts val="0"/>
+              </a:spcBef>
+              <a:spcAft>
+                <a:spcPts val="1100"/>
+              </a:spcAft>
+            </a:pPr>
+            <a:r>
+              <a:rPr sz="1500">
+                <a:solidFill>
+                  <a:srgbClr val="1A1F2B"/>
+                </a:solidFill>
+                <a:latin typeface="Calibri"/>
+              </a:rPr>
+              <a:t>▪ Reasons about who can assume a role: wildcard trust denied, unconstrained cross-account warned — on update, not just create.</a:t>
+            </a:r>
+          </a:p>
         </p:txBody>
       </p:sp>
       <p:sp>
@@ -9794,6 +9832,38 @@
                 </a:solidFill>
                 <a:latin typeface="Consolas"/>
               </a:rPr>
+              <a:t>  [HIGH]    no-wildcard-trust</a:t>
+            </a:r>
+          </a:p>
+          <a:p>
+            <a:pPr>
+              <a:spcAft>
+                <a:spcPts val="150"/>
+              </a:spcAft>
+            </a:pPr>
+            <a:r>
+              <a:rPr sz="1150" b="0">
+                <a:solidFill>
+                  <a:srgbClr val="E2E8F0"/>
+                </a:solidFill>
+                <a:latin typeface="Consolas"/>
+              </a:rPr>
+              <a:t>            legacy_integration trusts "*"</a:t>
+            </a:r>
+          </a:p>
+          <a:p>
+            <a:pPr>
+              <a:spcAft>
+                <a:spcPts val="150"/>
+              </a:spcAft>
+            </a:pPr>
+            <a:r>
+              <a:rPr sz="1150" b="0">
+                <a:solidFill>
+                  <a:srgbClr val="E2E8F0"/>
+                </a:solidFill>
+                <a:latin typeface="Consolas"/>
+              </a:rPr>
               <a:t> </a:t>
             </a:r>
           </a:p>
@@ -9868,7 +9938,7 @@
                 </a:solidFill>
                 <a:latin typeface="Calibri"/>
               </a:rPr>
-              <a:t>Real output — scenario 4 (risky plan)</a:t>
+              <a:t>Real output — scenario 5 (risky plan)</a:t>
             </a:r>
           </a:p>
         </p:txBody>
@@ -11792,7 +11862,7 @@
                 </a:solidFill>
                 <a:latin typeface="Calibri"/>
               </a:rPr>
-              <a:t>Policy rules fire on create and read inline policies — attachment resources and trust-policy changes need the same treatment.</a:t>
+              <a:t>Trust-policy changes are now gated (wildcard → deny, cross-account without ExternalId → warn), on create and update. Still open: attachment / inline resources evaluated as one effective-permission union.</a:t>
             </a:r>
           </a:p>
         </p:txBody>
